--- a/livro_ia_educacao/saida/pptx/Cap16_slides.pptx
+++ b/livro_ia_educacao/saida/pptx/Cap16_slides.pptx
@@ -10250,11 +10250,11 @@
         <p:spPr>
           <a:xfrm>
             <a:off x="548640" y="1417320"/>
-            <a:ext cx="11064240" cy="762000"/>
+            <a:ext cx="11064240" cy="682752"/>
           </a:xfrm>
           <a:prstGeom prst="roundRect">
             <a:avLst>
-              <a:gd name="adj" fmla="val 14400"/>
+              <a:gd name="adj" fmla="val 16071"/>
             </a:avLst>
           </a:prstGeom>
           <a:solidFill>
@@ -10281,7 +10281,7 @@
         <p:spPr>
           <a:xfrm>
             <a:off x="731520" y="1417320"/>
-            <a:ext cx="548640" cy="762000"/>
+            <a:ext cx="548640" cy="682752"/>
           </a:xfrm>
           <a:prstGeom prst="rect">
             <a:avLst/>
@@ -10317,7 +10317,7 @@
         <p:spPr>
           <a:xfrm>
             <a:off x="1463040" y="1417320"/>
-            <a:ext cx="9966960" cy="762000"/>
+            <a:ext cx="9966960" cy="682752"/>
           </a:xfrm>
           <a:prstGeom prst="rect">
             <a:avLst/>
@@ -10352,12 +10352,12 @@
         </p:nvSpPr>
         <p:spPr>
           <a:xfrm>
-            <a:off x="548640" y="2289048"/>
-            <a:ext cx="11064240" cy="762000"/>
+            <a:off x="548640" y="2209800"/>
+            <a:ext cx="11064240" cy="682752"/>
           </a:xfrm>
           <a:prstGeom prst="roundRect">
             <a:avLst>
-              <a:gd name="adj" fmla="val 14400"/>
+              <a:gd name="adj" fmla="val 16071"/>
             </a:avLst>
           </a:prstGeom>
           <a:solidFill>
@@ -10383,8 +10383,8 @@
         </p:nvSpPr>
         <p:spPr>
           <a:xfrm>
-            <a:off x="731520" y="2289048"/>
-            <a:ext cx="548640" cy="762000"/>
+            <a:off x="731520" y="2209800"/>
+            <a:ext cx="548640" cy="682752"/>
           </a:xfrm>
           <a:prstGeom prst="rect">
             <a:avLst/>
@@ -10419,8 +10419,8 @@
         </p:nvSpPr>
         <p:spPr>
           <a:xfrm>
-            <a:off x="1463040" y="2289048"/>
-            <a:ext cx="9966960" cy="762000"/>
+            <a:off x="1463040" y="2209800"/>
+            <a:ext cx="9966960" cy="682752"/>
           </a:xfrm>
           <a:prstGeom prst="rect">
             <a:avLst/>
@@ -10455,12 +10455,12 @@
         </p:nvSpPr>
         <p:spPr>
           <a:xfrm>
-            <a:off x="548640" y="3160776"/>
-            <a:ext cx="11064240" cy="762000"/>
+            <a:off x="548640" y="3002280"/>
+            <a:ext cx="11064240" cy="682752"/>
           </a:xfrm>
           <a:prstGeom prst="roundRect">
             <a:avLst>
-              <a:gd name="adj" fmla="val 14400"/>
+              <a:gd name="adj" fmla="val 16071"/>
             </a:avLst>
           </a:prstGeom>
           <a:solidFill>
@@ -10486,8 +10486,8 @@
         </p:nvSpPr>
         <p:spPr>
           <a:xfrm>
-            <a:off x="731520" y="3160776"/>
-            <a:ext cx="548640" cy="762000"/>
+            <a:off x="731520" y="3002280"/>
+            <a:ext cx="548640" cy="682752"/>
           </a:xfrm>
           <a:prstGeom prst="rect">
             <a:avLst/>
@@ -10522,8 +10522,8 @@
         </p:nvSpPr>
         <p:spPr>
           <a:xfrm>
-            <a:off x="1463040" y="3160776"/>
-            <a:ext cx="9966960" cy="762000"/>
+            <a:off x="1463040" y="3002280"/>
+            <a:ext cx="9966960" cy="682752"/>
           </a:xfrm>
           <a:prstGeom prst="rect">
             <a:avLst/>
@@ -10558,12 +10558,12 @@
         </p:nvSpPr>
         <p:spPr>
           <a:xfrm>
-            <a:off x="548640" y="4032504"/>
-            <a:ext cx="11064240" cy="762000"/>
+            <a:off x="548640" y="3794760"/>
+            <a:ext cx="11064240" cy="682752"/>
           </a:xfrm>
           <a:prstGeom prst="roundRect">
             <a:avLst>
-              <a:gd name="adj" fmla="val 14400"/>
+              <a:gd name="adj" fmla="val 16071"/>
             </a:avLst>
           </a:prstGeom>
           <a:solidFill>
@@ -10589,8 +10589,8 @@
         </p:nvSpPr>
         <p:spPr>
           <a:xfrm>
-            <a:off x="731520" y="4032504"/>
-            <a:ext cx="548640" cy="762000"/>
+            <a:off x="731520" y="3794760"/>
+            <a:ext cx="548640" cy="682752"/>
           </a:xfrm>
           <a:prstGeom prst="rect">
             <a:avLst/>
@@ -10625,8 +10625,8 @@
         </p:nvSpPr>
         <p:spPr>
           <a:xfrm>
-            <a:off x="1463040" y="4032504"/>
-            <a:ext cx="9966960" cy="762000"/>
+            <a:off x="1463040" y="3794760"/>
+            <a:ext cx="9966960" cy="682752"/>
           </a:xfrm>
           <a:prstGeom prst="rect">
             <a:avLst/>
@@ -10661,12 +10661,12 @@
         </p:nvSpPr>
         <p:spPr>
           <a:xfrm>
-            <a:off x="548640" y="4904232"/>
-            <a:ext cx="11064240" cy="762000"/>
+            <a:off x="548640" y="4587240"/>
+            <a:ext cx="11064240" cy="682752"/>
           </a:xfrm>
           <a:prstGeom prst="roundRect">
             <a:avLst>
-              <a:gd name="adj" fmla="val 14400"/>
+              <a:gd name="adj" fmla="val 16071"/>
             </a:avLst>
           </a:prstGeom>
           <a:solidFill>
@@ -10692,8 +10692,8 @@
         </p:nvSpPr>
         <p:spPr>
           <a:xfrm>
-            <a:off x="731520" y="4904232"/>
-            <a:ext cx="548640" cy="762000"/>
+            <a:off x="731520" y="4587240"/>
+            <a:ext cx="548640" cy="682752"/>
           </a:xfrm>
           <a:prstGeom prst="rect">
             <a:avLst/>
@@ -10728,8 +10728,8 @@
         </p:nvSpPr>
         <p:spPr>
           <a:xfrm>
-            <a:off x="1463040" y="4904232"/>
-            <a:ext cx="9966960" cy="762000"/>
+            <a:off x="1463040" y="4587240"/>
+            <a:ext cx="9966960" cy="682752"/>
           </a:xfrm>
           <a:prstGeom prst="rect">
             <a:avLst/>
@@ -10764,12 +10764,12 @@
         </p:nvSpPr>
         <p:spPr>
           <a:xfrm>
-            <a:off x="548640" y="5775960"/>
-            <a:ext cx="11064240" cy="762000"/>
+            <a:off x="548640" y="5379720"/>
+            <a:ext cx="11064240" cy="682752"/>
           </a:xfrm>
           <a:prstGeom prst="roundRect">
             <a:avLst>
-              <a:gd name="adj" fmla="val 14400"/>
+              <a:gd name="adj" fmla="val 16071"/>
             </a:avLst>
           </a:prstGeom>
           <a:solidFill>
@@ -10795,8 +10795,8 @@
         </p:nvSpPr>
         <p:spPr>
           <a:xfrm>
-            <a:off x="731520" y="5775960"/>
-            <a:ext cx="548640" cy="762000"/>
+            <a:off x="731520" y="5379720"/>
+            <a:ext cx="548640" cy="682752"/>
           </a:xfrm>
           <a:prstGeom prst="rect">
             <a:avLst/>
@@ -10831,8 +10831,8 @@
         </p:nvSpPr>
         <p:spPr>
           <a:xfrm>
-            <a:off x="1463040" y="5775960"/>
-            <a:ext cx="9966960" cy="762000"/>
+            <a:off x="1463040" y="5379720"/>
+            <a:ext cx="9966960" cy="682752"/>
           </a:xfrm>
           <a:prstGeom prst="rect">
             <a:avLst/>
